--- a/case_study/WiFi Booster Impact.pptx
+++ b/case_study/WiFi Booster Impact.pptx
@@ -26231,6 +26231,880 @@
           </a:p>
         </p:txBody>
       </p:sp>
+      <p:sp>
+        <p:nvSpPr>
+          <p:cNvPr id="4" name="TextBox 3">
+            <a:extLst>
+              <a:ext uri="{FF2B5EF4-FFF2-40B4-BE49-F238E27FC236}">
+                <a16:creationId xmlns:a16="http://schemas.microsoft.com/office/drawing/2014/main" id="{AD4A4A11-C399-3D3F-4FA9-1B995FDF3A9B}"/>
+              </a:ext>
+            </a:extLst>
+          </p:cNvPr>
+          <p:cNvSpPr txBox="1"/>
+          <p:nvPr/>
+        </p:nvSpPr>
+        <p:spPr>
+          <a:xfrm>
+            <a:off x="394174" y="126177"/>
+            <a:ext cx="11161240" cy="2677656"/>
+          </a:xfrm>
+          <a:prstGeom prst="rect">
+            <a:avLst/>
+          </a:prstGeom>
+          <a:noFill/>
+        </p:spPr>
+        <p:txBody>
+          <a:bodyPr wrap="square" rtlCol="0">
+            <a:spAutoFit/>
+          </a:bodyPr>
+          <a:lstStyle/>
+          <a:p>
+            <a:r>
+              <a:rPr lang="cs-CZ" sz="1400" i="1" dirty="0">
+                <a:solidFill>
+                  <a:srgbClr val="FF0000"/>
+                </a:solidFill>
+              </a:rPr>
+              <a:t>SB:</a:t>
+            </a:r>
+            <a:endParaRPr lang="cs-CZ" sz="1400" i="1" u="sng" dirty="0">
+              <a:solidFill>
+                <a:srgbClr val="FF0000"/>
+              </a:solidFill>
+            </a:endParaRPr>
+          </a:p>
+          <a:p>
+            <a:pPr marL="342900" indent="-342900">
+              <a:buAutoNum type="arabicParenR"/>
+            </a:pPr>
+            <a:r>
+              <a:rPr lang="cs-CZ" sz="1400" i="1" dirty="0" err="1">
+                <a:solidFill>
+                  <a:srgbClr val="FF0000"/>
+                </a:solidFill>
+              </a:rPr>
+              <a:t>Typos</a:t>
+            </a:r>
+            <a:r>
+              <a:rPr lang="cs-CZ" sz="1400" i="1" dirty="0">
+                <a:solidFill>
+                  <a:srgbClr val="FF0000"/>
+                </a:solidFill>
+              </a:rPr>
+              <a:t>!</a:t>
+            </a:r>
+          </a:p>
+          <a:p>
+            <a:pPr marL="342900" indent="-342900">
+              <a:buAutoNum type="arabicParenR"/>
+            </a:pPr>
+            <a:r>
+              <a:rPr lang="cs-CZ" sz="1400" i="1" dirty="0" err="1">
+                <a:solidFill>
+                  <a:srgbClr val="FF0000"/>
+                </a:solidFill>
+              </a:rPr>
+              <a:t>What</a:t>
+            </a:r>
+            <a:r>
+              <a:rPr lang="cs-CZ" sz="1400" i="1" dirty="0">
+                <a:solidFill>
+                  <a:srgbClr val="FF0000"/>
+                </a:solidFill>
+              </a:rPr>
+              <a:t> </a:t>
+            </a:r>
+            <a:r>
+              <a:rPr lang="cs-CZ" sz="1400" i="1" dirty="0" err="1">
+                <a:solidFill>
+                  <a:srgbClr val="FF0000"/>
+                </a:solidFill>
+              </a:rPr>
+              <a:t>must</a:t>
+            </a:r>
+            <a:r>
+              <a:rPr lang="cs-CZ" sz="1400" i="1" dirty="0">
+                <a:solidFill>
+                  <a:srgbClr val="FF0000"/>
+                </a:solidFill>
+              </a:rPr>
+              <a:t> </a:t>
+            </a:r>
+            <a:r>
+              <a:rPr lang="cs-CZ" sz="1400" i="1" dirty="0" err="1">
+                <a:solidFill>
+                  <a:srgbClr val="FF0000"/>
+                </a:solidFill>
+              </a:rPr>
+              <a:t>be</a:t>
+            </a:r>
+            <a:r>
+              <a:rPr lang="cs-CZ" sz="1400" i="1" dirty="0">
+                <a:solidFill>
+                  <a:srgbClr val="FF0000"/>
+                </a:solidFill>
+              </a:rPr>
+              <a:t> </a:t>
+            </a:r>
+            <a:r>
+              <a:rPr lang="cs-CZ" sz="1400" i="1" dirty="0" err="1">
+                <a:solidFill>
+                  <a:srgbClr val="FF0000"/>
+                </a:solidFill>
+              </a:rPr>
+              <a:t>answered</a:t>
+            </a:r>
+            <a:r>
+              <a:rPr lang="cs-CZ" sz="1400" i="1" dirty="0">
+                <a:solidFill>
+                  <a:srgbClr val="FF0000"/>
+                </a:solidFill>
+              </a:rPr>
+              <a:t> </a:t>
+            </a:r>
+            <a:r>
+              <a:rPr lang="cs-CZ" sz="1400" i="1" dirty="0" err="1">
+                <a:solidFill>
+                  <a:srgbClr val="FF0000"/>
+                </a:solidFill>
+              </a:rPr>
+              <a:t>for</a:t>
+            </a:r>
+            <a:r>
+              <a:rPr lang="cs-CZ" sz="1400" i="1" dirty="0">
+                <a:solidFill>
+                  <a:srgbClr val="FF0000"/>
+                </a:solidFill>
+              </a:rPr>
+              <a:t> C-level:</a:t>
+            </a:r>
+          </a:p>
+          <a:p>
+            <a:pPr marL="800100" lvl="1" indent="-342900">
+              <a:buAutoNum type="arabicParenR"/>
+            </a:pPr>
+            <a:r>
+              <a:rPr lang="cs-CZ" sz="1400" i="1" dirty="0" err="1">
+                <a:solidFill>
+                  <a:srgbClr val="FF0000"/>
+                </a:solidFill>
+              </a:rPr>
+              <a:t>Does</a:t>
+            </a:r>
+            <a:r>
+              <a:rPr lang="cs-CZ" sz="1400" i="1" dirty="0">
+                <a:solidFill>
+                  <a:srgbClr val="FF0000"/>
+                </a:solidFill>
+              </a:rPr>
+              <a:t> </a:t>
+            </a:r>
+            <a:r>
+              <a:rPr lang="cs-CZ" sz="1400" i="1" dirty="0" err="1">
+                <a:solidFill>
+                  <a:srgbClr val="FF0000"/>
+                </a:solidFill>
+              </a:rPr>
+              <a:t>it</a:t>
+            </a:r>
+            <a:r>
+              <a:rPr lang="cs-CZ" sz="1400" i="1" dirty="0">
+                <a:solidFill>
+                  <a:srgbClr val="FF0000"/>
+                </a:solidFill>
+              </a:rPr>
+              <a:t> </a:t>
+            </a:r>
+            <a:r>
+              <a:rPr lang="cs-CZ" sz="1400" i="1" dirty="0" err="1">
+                <a:solidFill>
+                  <a:srgbClr val="FF0000"/>
+                </a:solidFill>
+              </a:rPr>
+              <a:t>worth</a:t>
+            </a:r>
+            <a:r>
+              <a:rPr lang="cs-CZ" sz="1400" i="1" dirty="0">
+                <a:solidFill>
+                  <a:srgbClr val="FF0000"/>
+                </a:solidFill>
+              </a:rPr>
+              <a:t> his </a:t>
+            </a:r>
+            <a:r>
+              <a:rPr lang="cs-CZ" sz="1400" i="1" dirty="0" err="1">
+                <a:solidFill>
+                  <a:srgbClr val="FF0000"/>
+                </a:solidFill>
+              </a:rPr>
+              <a:t>time</a:t>
+            </a:r>
+            <a:r>
+              <a:rPr lang="cs-CZ" sz="1400" i="1" dirty="0">
+                <a:solidFill>
+                  <a:srgbClr val="FF0000"/>
+                </a:solidFill>
+              </a:rPr>
+              <a:t>?</a:t>
+            </a:r>
+          </a:p>
+          <a:p>
+            <a:pPr marL="800100" lvl="1" indent="-342900">
+              <a:buAutoNum type="arabicParenR"/>
+            </a:pPr>
+            <a:r>
+              <a:rPr lang="cs-CZ" sz="1400" i="1" dirty="0" err="1">
+                <a:solidFill>
+                  <a:srgbClr val="FF0000"/>
+                </a:solidFill>
+              </a:rPr>
+              <a:t>Is</a:t>
+            </a:r>
+            <a:r>
+              <a:rPr lang="cs-CZ" sz="1400" i="1" dirty="0">
+                <a:solidFill>
+                  <a:srgbClr val="FF0000"/>
+                </a:solidFill>
+              </a:rPr>
+              <a:t> </a:t>
+            </a:r>
+            <a:r>
+              <a:rPr lang="cs-CZ" sz="1400" i="1" dirty="0" err="1">
+                <a:solidFill>
+                  <a:srgbClr val="FF0000"/>
+                </a:solidFill>
+              </a:rPr>
+              <a:t>it</a:t>
+            </a:r>
+            <a:r>
+              <a:rPr lang="cs-CZ" sz="1400" i="1" dirty="0">
+                <a:solidFill>
+                  <a:srgbClr val="FF0000"/>
+                </a:solidFill>
+              </a:rPr>
+              <a:t> on a </a:t>
+            </a:r>
+            <a:r>
+              <a:rPr lang="cs-CZ" sz="1400" i="1" dirty="0" err="1">
+                <a:solidFill>
+                  <a:srgbClr val="FF0000"/>
+                </a:solidFill>
+              </a:rPr>
+              <a:t>good</a:t>
+            </a:r>
+            <a:r>
+              <a:rPr lang="cs-CZ" sz="1400" i="1" dirty="0">
+                <a:solidFill>
+                  <a:srgbClr val="FF0000"/>
+                </a:solidFill>
+              </a:rPr>
+              <a:t> track?</a:t>
+            </a:r>
+          </a:p>
+          <a:p>
+            <a:pPr marL="342900" indent="-342900">
+              <a:buAutoNum type="arabicParenR"/>
+            </a:pPr>
+            <a:r>
+              <a:rPr lang="cs-CZ" sz="1400" i="1" dirty="0" err="1">
+                <a:solidFill>
+                  <a:srgbClr val="FF0000"/>
+                </a:solidFill>
+              </a:rPr>
+              <a:t>Presentation</a:t>
+            </a:r>
+            <a:r>
+              <a:rPr lang="cs-CZ" sz="1400" i="1" dirty="0">
+                <a:solidFill>
+                  <a:srgbClr val="FF0000"/>
+                </a:solidFill>
+              </a:rPr>
+              <a:t>:</a:t>
+            </a:r>
+          </a:p>
+          <a:p>
+            <a:pPr marL="800100" lvl="1" indent="-342900">
+              <a:buAutoNum type="arabicParenR"/>
+            </a:pPr>
+            <a:r>
+              <a:rPr lang="cs-CZ" sz="1400" i="1" dirty="0" err="1">
+                <a:solidFill>
+                  <a:srgbClr val="FF0000"/>
+                </a:solidFill>
+              </a:rPr>
+              <a:t>For</a:t>
+            </a:r>
+            <a:r>
+              <a:rPr lang="cs-CZ" sz="1400" i="1" dirty="0">
+                <a:solidFill>
+                  <a:srgbClr val="FF0000"/>
+                </a:solidFill>
+              </a:rPr>
+              <a:t> 10 min slot: 5min </a:t>
+            </a:r>
+            <a:r>
+              <a:rPr lang="cs-CZ" sz="1400" i="1" dirty="0" err="1">
+                <a:solidFill>
+                  <a:srgbClr val="FF0000"/>
+                </a:solidFill>
+              </a:rPr>
+              <a:t>slides</a:t>
+            </a:r>
+            <a:r>
+              <a:rPr lang="cs-CZ" sz="1400" i="1" dirty="0">
+                <a:solidFill>
+                  <a:srgbClr val="FF0000"/>
+                </a:solidFill>
+              </a:rPr>
+              <a:t> + 5 min Q&amp;A</a:t>
+            </a:r>
+          </a:p>
+          <a:p>
+            <a:pPr marL="800100" lvl="1" indent="-342900">
+              <a:buAutoNum type="arabicParenR"/>
+            </a:pPr>
+            <a:r>
+              <a:rPr lang="cs-CZ" sz="1400" i="1" dirty="0">
+                <a:solidFill>
+                  <a:srgbClr val="FF0000"/>
+                </a:solidFill>
+              </a:rPr>
+              <a:t>1 slide – </a:t>
+            </a:r>
+            <a:r>
+              <a:rPr lang="cs-CZ" sz="1400" i="1" dirty="0" err="1">
+                <a:solidFill>
+                  <a:srgbClr val="FF0000"/>
+                </a:solidFill>
+              </a:rPr>
+              <a:t>executive</a:t>
+            </a:r>
+            <a:r>
+              <a:rPr lang="cs-CZ" sz="1400" i="1" dirty="0">
+                <a:solidFill>
+                  <a:srgbClr val="FF0000"/>
+                </a:solidFill>
+              </a:rPr>
+              <a:t> </a:t>
+            </a:r>
+            <a:r>
+              <a:rPr lang="cs-CZ" sz="1400" i="1" dirty="0" err="1">
+                <a:solidFill>
+                  <a:srgbClr val="FF0000"/>
+                </a:solidFill>
+              </a:rPr>
+              <a:t>summary</a:t>
+            </a:r>
+            <a:r>
+              <a:rPr lang="cs-CZ" sz="1400" i="1" dirty="0">
+                <a:solidFill>
+                  <a:srgbClr val="FF0000"/>
+                </a:solidFill>
+              </a:rPr>
+              <a:t> (</a:t>
+            </a:r>
+            <a:r>
+              <a:rPr lang="cs-CZ" sz="1400" i="1" dirty="0" err="1">
+                <a:solidFill>
+                  <a:srgbClr val="FF0000"/>
+                </a:solidFill>
+              </a:rPr>
+              <a:t>key</a:t>
+            </a:r>
+            <a:r>
+              <a:rPr lang="cs-CZ" sz="1400" i="1" dirty="0">
+                <a:solidFill>
+                  <a:srgbClr val="FF0000"/>
+                </a:solidFill>
+              </a:rPr>
+              <a:t> </a:t>
+            </a:r>
+            <a:r>
+              <a:rPr lang="cs-CZ" sz="1400" i="1" dirty="0" err="1">
+                <a:solidFill>
+                  <a:srgbClr val="FF0000"/>
+                </a:solidFill>
+              </a:rPr>
+              <a:t>result</a:t>
+            </a:r>
+            <a:r>
+              <a:rPr lang="cs-CZ" sz="1400" i="1" dirty="0">
+                <a:solidFill>
+                  <a:srgbClr val="FF0000"/>
+                </a:solidFill>
+              </a:rPr>
+              <a:t> / </a:t>
+            </a:r>
+            <a:r>
+              <a:rPr lang="cs-CZ" sz="1400" i="1" dirty="0" err="1">
+                <a:solidFill>
+                  <a:srgbClr val="FF0000"/>
+                </a:solidFill>
+              </a:rPr>
+              <a:t>actionables</a:t>
+            </a:r>
+            <a:r>
+              <a:rPr lang="cs-CZ" sz="1400" i="1" dirty="0">
+                <a:solidFill>
+                  <a:srgbClr val="FF0000"/>
+                </a:solidFill>
+              </a:rPr>
+              <a:t> )</a:t>
+            </a:r>
+          </a:p>
+          <a:p>
+            <a:pPr marL="800100" lvl="1" indent="-342900">
+              <a:buAutoNum type="arabicParenR"/>
+            </a:pPr>
+            <a:r>
+              <a:rPr lang="cs-CZ" sz="1400" i="1" dirty="0">
+                <a:solidFill>
+                  <a:srgbClr val="FF0000"/>
+                </a:solidFill>
+              </a:rPr>
+              <a:t>2-3 </a:t>
+            </a:r>
+            <a:r>
+              <a:rPr lang="cs-CZ" sz="1400" i="1" dirty="0" err="1">
+                <a:solidFill>
+                  <a:srgbClr val="FF0000"/>
+                </a:solidFill>
+              </a:rPr>
+              <a:t>slides</a:t>
+            </a:r>
+            <a:r>
+              <a:rPr lang="cs-CZ" sz="1400" i="1" dirty="0">
+                <a:solidFill>
+                  <a:srgbClr val="FF0000"/>
+                </a:solidFill>
+              </a:rPr>
+              <a:t> – set </a:t>
+            </a:r>
+            <a:r>
+              <a:rPr lang="cs-CZ" sz="1400" i="1" dirty="0" err="1">
+                <a:solidFill>
+                  <a:srgbClr val="FF0000"/>
+                </a:solidFill>
+              </a:rPr>
+              <a:t>the</a:t>
+            </a:r>
+            <a:r>
+              <a:rPr lang="cs-CZ" sz="1400" i="1" dirty="0">
+                <a:solidFill>
+                  <a:srgbClr val="FF0000"/>
+                </a:solidFill>
+              </a:rPr>
+              <a:t> </a:t>
+            </a:r>
+            <a:r>
+              <a:rPr lang="cs-CZ" sz="1400" i="1" dirty="0" err="1">
+                <a:solidFill>
+                  <a:srgbClr val="FF0000"/>
+                </a:solidFill>
+              </a:rPr>
+              <a:t>stage</a:t>
+            </a:r>
+            <a:r>
+              <a:rPr lang="cs-CZ" sz="1400" i="1" dirty="0">
+                <a:solidFill>
+                  <a:srgbClr val="FF0000"/>
+                </a:solidFill>
+              </a:rPr>
+              <a:t> (</a:t>
+            </a:r>
+            <a:r>
+              <a:rPr lang="cs-CZ" sz="1400" i="1" dirty="0" err="1">
+                <a:solidFill>
+                  <a:srgbClr val="FF0000"/>
+                </a:solidFill>
+              </a:rPr>
+              <a:t>must</a:t>
+            </a:r>
+            <a:r>
+              <a:rPr lang="cs-CZ" sz="1400" i="1" dirty="0">
+                <a:solidFill>
+                  <a:srgbClr val="FF0000"/>
+                </a:solidFill>
+              </a:rPr>
+              <a:t> </a:t>
+            </a:r>
+            <a:r>
+              <a:rPr lang="cs-CZ" sz="1400" i="1" dirty="0" err="1">
+                <a:solidFill>
+                  <a:srgbClr val="FF0000"/>
+                </a:solidFill>
+              </a:rPr>
+              <a:t>be</a:t>
+            </a:r>
+            <a:r>
+              <a:rPr lang="cs-CZ" sz="1400" i="1" dirty="0">
+                <a:solidFill>
+                  <a:srgbClr val="FF0000"/>
+                </a:solidFill>
+              </a:rPr>
+              <a:t> </a:t>
+            </a:r>
+            <a:r>
+              <a:rPr lang="cs-CZ" sz="1400" i="1" dirty="0" err="1">
+                <a:solidFill>
+                  <a:srgbClr val="FF0000"/>
+                </a:solidFill>
+              </a:rPr>
+              <a:t>easy</a:t>
+            </a:r>
+            <a:r>
+              <a:rPr lang="cs-CZ" sz="1400" i="1" dirty="0">
+                <a:solidFill>
+                  <a:srgbClr val="FF0000"/>
+                </a:solidFill>
+              </a:rPr>
+              <a:t> to </a:t>
+            </a:r>
+            <a:r>
+              <a:rPr lang="cs-CZ" sz="1400" i="1" dirty="0" err="1">
+                <a:solidFill>
+                  <a:srgbClr val="FF0000"/>
+                </a:solidFill>
+              </a:rPr>
+              <a:t>follow</a:t>
+            </a:r>
+            <a:r>
+              <a:rPr lang="cs-CZ" sz="1400" i="1" dirty="0">
+                <a:solidFill>
+                  <a:srgbClr val="FF0000"/>
+                </a:solidFill>
+              </a:rPr>
+              <a:t>)</a:t>
+            </a:r>
+          </a:p>
+          <a:p>
+            <a:pPr marL="800100" lvl="1" indent="-342900">
+              <a:buAutoNum type="arabicParenR"/>
+            </a:pPr>
+            <a:r>
+              <a:rPr lang="cs-CZ" sz="1400" i="1" dirty="0">
+                <a:solidFill>
+                  <a:srgbClr val="FF0000"/>
+                </a:solidFill>
+              </a:rPr>
+              <a:t>1 slide – “Aha!“ slide (</a:t>
+            </a:r>
+            <a:r>
+              <a:rPr lang="cs-CZ" sz="1400" i="1" dirty="0" err="1">
+                <a:solidFill>
+                  <a:srgbClr val="FF0000"/>
+                </a:solidFill>
+              </a:rPr>
+              <a:t>key</a:t>
+            </a:r>
+            <a:r>
+              <a:rPr lang="cs-CZ" sz="1400" i="1" dirty="0">
+                <a:solidFill>
+                  <a:srgbClr val="FF0000"/>
+                </a:solidFill>
+              </a:rPr>
+              <a:t> </a:t>
+            </a:r>
+            <a:r>
+              <a:rPr lang="cs-CZ" sz="1400" i="1" dirty="0" err="1">
+                <a:solidFill>
+                  <a:srgbClr val="FF0000"/>
+                </a:solidFill>
+              </a:rPr>
+              <a:t>message</a:t>
+            </a:r>
+            <a:r>
+              <a:rPr lang="cs-CZ" sz="1400" i="1" dirty="0">
+                <a:solidFill>
+                  <a:srgbClr val="FF0000"/>
+                </a:solidFill>
+              </a:rPr>
+              <a:t> / </a:t>
+            </a:r>
+            <a:r>
+              <a:rPr lang="cs-CZ" sz="1400" i="1" dirty="0" err="1">
+                <a:solidFill>
+                  <a:srgbClr val="FF0000"/>
+                </a:solidFill>
+              </a:rPr>
+              <a:t>finding</a:t>
+            </a:r>
+            <a:r>
+              <a:rPr lang="cs-CZ" sz="1400" i="1" dirty="0">
+                <a:solidFill>
+                  <a:srgbClr val="FF0000"/>
+                </a:solidFill>
+              </a:rPr>
+              <a:t>), </a:t>
+            </a:r>
+            <a:r>
+              <a:rPr lang="cs-CZ" sz="1400" i="1" dirty="0" err="1">
+                <a:solidFill>
+                  <a:srgbClr val="FF0000"/>
+                </a:solidFill>
+              </a:rPr>
+              <a:t>here</a:t>
+            </a:r>
+            <a:r>
+              <a:rPr lang="cs-CZ" sz="1400" i="1" dirty="0">
+                <a:solidFill>
+                  <a:srgbClr val="FF0000"/>
+                </a:solidFill>
+              </a:rPr>
+              <a:t> </a:t>
+            </a:r>
+            <a:r>
+              <a:rPr lang="cs-CZ" sz="1400" i="1" dirty="0" err="1">
+                <a:solidFill>
+                  <a:srgbClr val="FF0000"/>
+                </a:solidFill>
+              </a:rPr>
+              <a:t>spend</a:t>
+            </a:r>
+            <a:r>
+              <a:rPr lang="cs-CZ" sz="1400" i="1" dirty="0">
+                <a:solidFill>
+                  <a:srgbClr val="FF0000"/>
+                </a:solidFill>
+              </a:rPr>
+              <a:t> </a:t>
+            </a:r>
+            <a:r>
+              <a:rPr lang="cs-CZ" sz="1400" i="1" dirty="0" err="1">
+                <a:solidFill>
+                  <a:srgbClr val="FF0000"/>
+                </a:solidFill>
+              </a:rPr>
+              <a:t>time</a:t>
+            </a:r>
+            <a:r>
+              <a:rPr lang="cs-CZ" sz="1400" i="1" dirty="0">
+                <a:solidFill>
+                  <a:srgbClr val="FF0000"/>
+                </a:solidFill>
+              </a:rPr>
+              <a:t> </a:t>
+            </a:r>
+            <a:r>
+              <a:rPr lang="cs-CZ" sz="1400" i="1" dirty="0" err="1">
+                <a:solidFill>
+                  <a:srgbClr val="FF0000"/>
+                </a:solidFill>
+              </a:rPr>
+              <a:t>for</a:t>
+            </a:r>
+            <a:r>
+              <a:rPr lang="cs-CZ" sz="1400" i="1" dirty="0">
+                <a:solidFill>
+                  <a:srgbClr val="FF0000"/>
+                </a:solidFill>
+              </a:rPr>
+              <a:t> </a:t>
+            </a:r>
+            <a:r>
+              <a:rPr lang="cs-CZ" sz="1400" i="1" dirty="0" err="1">
+                <a:solidFill>
+                  <a:srgbClr val="FF0000"/>
+                </a:solidFill>
+              </a:rPr>
+              <a:t>discussion</a:t>
+            </a:r>
+            <a:r>
+              <a:rPr lang="cs-CZ" sz="1400" i="1" dirty="0">
+                <a:solidFill>
+                  <a:srgbClr val="FF0000"/>
+                </a:solidFill>
+              </a:rPr>
+              <a:t> and </a:t>
+            </a:r>
+            <a:r>
+              <a:rPr lang="cs-CZ" sz="1400" i="1" dirty="0" err="1">
+                <a:solidFill>
+                  <a:srgbClr val="FF0000"/>
+                </a:solidFill>
+              </a:rPr>
+              <a:t>next</a:t>
+            </a:r>
+            <a:r>
+              <a:rPr lang="cs-CZ" sz="1400" i="1" dirty="0">
+                <a:solidFill>
+                  <a:srgbClr val="FF0000"/>
+                </a:solidFill>
+              </a:rPr>
+              <a:t> </a:t>
+            </a:r>
+            <a:r>
+              <a:rPr lang="cs-CZ" sz="1400" i="1" dirty="0" err="1">
+                <a:solidFill>
+                  <a:srgbClr val="FF0000"/>
+                </a:solidFill>
+              </a:rPr>
+              <a:t>steps</a:t>
+            </a:r>
+            <a:endParaRPr lang="cs-CZ" sz="1400" i="1" dirty="0">
+              <a:solidFill>
+                <a:srgbClr val="FF0000"/>
+              </a:solidFill>
+            </a:endParaRPr>
+          </a:p>
+          <a:p>
+            <a:pPr marL="800100" lvl="1" indent="-342900">
+              <a:buAutoNum type="arabicParenR"/>
+            </a:pPr>
+            <a:r>
+              <a:rPr lang="cs-CZ" sz="1400" i="1" dirty="0" err="1">
+                <a:solidFill>
+                  <a:srgbClr val="FF0000"/>
+                </a:solidFill>
+              </a:rPr>
+              <a:t>Appendix</a:t>
+            </a:r>
+            <a:r>
+              <a:rPr lang="cs-CZ" sz="1400" i="1" dirty="0">
+                <a:solidFill>
+                  <a:srgbClr val="FF0000"/>
+                </a:solidFill>
+              </a:rPr>
+              <a:t> – </a:t>
+            </a:r>
+            <a:r>
+              <a:rPr lang="cs-CZ" sz="1400" i="1" dirty="0" err="1">
+                <a:solidFill>
+                  <a:srgbClr val="FF0000"/>
+                </a:solidFill>
+              </a:rPr>
+              <a:t>all</a:t>
+            </a:r>
+            <a:r>
+              <a:rPr lang="cs-CZ" sz="1400" i="1" dirty="0">
+                <a:solidFill>
+                  <a:srgbClr val="FF0000"/>
+                </a:solidFill>
+              </a:rPr>
+              <a:t> </a:t>
+            </a:r>
+            <a:r>
+              <a:rPr lang="cs-CZ" sz="1400" i="1" dirty="0" err="1">
+                <a:solidFill>
+                  <a:srgbClr val="FF0000"/>
+                </a:solidFill>
+              </a:rPr>
+              <a:t>other</a:t>
+            </a:r>
+            <a:r>
+              <a:rPr lang="cs-CZ" sz="1400" i="1" dirty="0">
+                <a:solidFill>
+                  <a:srgbClr val="FF0000"/>
+                </a:solidFill>
+              </a:rPr>
+              <a:t> </a:t>
+            </a:r>
+            <a:r>
+              <a:rPr lang="cs-CZ" sz="1400" i="1" dirty="0" err="1">
+                <a:solidFill>
+                  <a:srgbClr val="FF0000"/>
+                </a:solidFill>
+              </a:rPr>
+              <a:t>slides</a:t>
+            </a:r>
+            <a:r>
+              <a:rPr lang="cs-CZ" sz="1400" i="1" dirty="0">
+                <a:solidFill>
+                  <a:srgbClr val="FF0000"/>
+                </a:solidFill>
+              </a:rPr>
+              <a:t> </a:t>
+            </a:r>
+            <a:r>
+              <a:rPr lang="cs-CZ" sz="1400" i="1" dirty="0" err="1">
+                <a:solidFill>
+                  <a:srgbClr val="FF0000"/>
+                </a:solidFill>
+              </a:rPr>
+              <a:t>for</a:t>
+            </a:r>
+            <a:r>
+              <a:rPr lang="cs-CZ" sz="1400" i="1" dirty="0">
+                <a:solidFill>
+                  <a:srgbClr val="FF0000"/>
+                </a:solidFill>
+              </a:rPr>
+              <a:t> </a:t>
+            </a:r>
+            <a:r>
+              <a:rPr lang="cs-CZ" sz="1400" i="1" dirty="0" err="1">
+                <a:solidFill>
+                  <a:srgbClr val="FF0000"/>
+                </a:solidFill>
+              </a:rPr>
+              <a:t>deep</a:t>
+            </a:r>
+            <a:r>
+              <a:rPr lang="cs-CZ" sz="1400" i="1" dirty="0">
+                <a:solidFill>
+                  <a:srgbClr val="FF0000"/>
+                </a:solidFill>
+              </a:rPr>
+              <a:t> </a:t>
+            </a:r>
+            <a:r>
+              <a:rPr lang="cs-CZ" sz="1400" i="1" dirty="0" err="1">
+                <a:solidFill>
+                  <a:srgbClr val="FF0000"/>
+                </a:solidFill>
+              </a:rPr>
+              <a:t>dives</a:t>
+            </a:r>
+            <a:r>
+              <a:rPr lang="cs-CZ" sz="1400" i="1" dirty="0">
+                <a:solidFill>
+                  <a:srgbClr val="FF0000"/>
+                </a:solidFill>
+              </a:rPr>
+              <a:t> / </a:t>
+            </a:r>
+            <a:r>
+              <a:rPr lang="cs-CZ" sz="1400" i="1" dirty="0" err="1">
+                <a:solidFill>
+                  <a:srgbClr val="FF0000"/>
+                </a:solidFill>
+              </a:rPr>
+              <a:t>offline</a:t>
+            </a:r>
+            <a:r>
+              <a:rPr lang="cs-CZ" sz="1400" i="1" dirty="0">
+                <a:solidFill>
+                  <a:srgbClr val="FF0000"/>
+                </a:solidFill>
+              </a:rPr>
+              <a:t> </a:t>
+            </a:r>
+            <a:r>
+              <a:rPr lang="cs-CZ" sz="1400" i="1" dirty="0" err="1">
+                <a:solidFill>
+                  <a:srgbClr val="FF0000"/>
+                </a:solidFill>
+              </a:rPr>
+              <a:t>reading</a:t>
+            </a:r>
+            <a:endParaRPr lang="cs-CZ" sz="1400" i="1" dirty="0">
+              <a:solidFill>
+                <a:srgbClr val="FF0000"/>
+              </a:solidFill>
+            </a:endParaRPr>
+          </a:p>
+          <a:p>
+            <a:pPr marL="800100" lvl="1" indent="-342900">
+              <a:buAutoNum type="arabicParenR"/>
+            </a:pPr>
+            <a:endParaRPr lang="en-US" sz="1400" i="1" dirty="0">
+              <a:solidFill>
+                <a:srgbClr val="FF0000"/>
+              </a:solidFill>
+            </a:endParaRPr>
+          </a:p>
+        </p:txBody>
+      </p:sp>
     </p:spTree>
     <p:extLst>
       <p:ext uri="{BB962C8B-B14F-4D97-AF65-F5344CB8AC3E}">
@@ -28206,8 +29080,8 @@
         </p:nvSpPr>
         <p:spPr>
           <a:xfrm>
-            <a:off x="7392144" y="2492896"/>
-            <a:ext cx="4365298" cy="2031325"/>
+            <a:off x="6528048" y="2348880"/>
+            <a:ext cx="5391538" cy="3139321"/>
           </a:xfrm>
           <a:prstGeom prst="rect">
             <a:avLst/>
@@ -28215,7 +29089,7 @@
           <a:noFill/>
         </p:spPr>
         <p:txBody>
-          <a:bodyPr wrap="none" rtlCol="0">
+          <a:bodyPr wrap="square" rtlCol="0">
             <a:spAutoFit/>
           </a:bodyPr>
           <a:lstStyle/>
@@ -28243,7 +29117,20 @@
                   <a:srgbClr val="FF0000"/>
                 </a:solidFill>
               </a:rPr>
-              <a:t>SB: 0.13277 are </a:t>
+              <a:t>SB: </a:t>
+            </a:r>
+          </a:p>
+          <a:p>
+            <a:pPr marL="342900" indent="-342900">
+              <a:buAutoNum type="arabicParenR"/>
+            </a:pPr>
+            <a:r>
+              <a:rPr lang="cs-CZ" i="1" dirty="0">
+                <a:solidFill>
+                  <a:srgbClr val="FF0000"/>
+                </a:solidFill>
+              </a:rPr>
+              <a:t>0.13277 are </a:t>
             </a:r>
             <a:r>
               <a:rPr lang="cs-CZ" i="1" dirty="0" err="1">
@@ -28259,41 +29146,39 @@
                   <a:srgbClr val="FF0000"/>
                 </a:solidFill>
               </a:rPr>
-              <a:t> not probability,</a:t>
-            </a:r>
-          </a:p>
-          <a:p>
-            <a:endParaRPr lang="cs-CZ" i="1" dirty="0">
-              <a:solidFill>
-                <a:srgbClr val="FF0000"/>
-              </a:solidFill>
-            </a:endParaRPr>
-          </a:p>
-          <a:p>
+              <a:t>, not probability. </a:t>
+            </a:r>
+            <a:r>
+              <a:rPr lang="cs-CZ" i="1" dirty="0" err="1">
+                <a:solidFill>
+                  <a:srgbClr val="FF0000"/>
+                </a:solidFill>
+              </a:rPr>
+              <a:t>If</a:t>
+            </a:r>
             <a:r>
               <a:rPr lang="cs-CZ" i="1" dirty="0">
                 <a:solidFill>
                   <a:srgbClr val="FF0000"/>
                 </a:solidFill>
               </a:rPr>
-              <a:t>use</a:t>
-            </a:r>
-          </a:p>
-          <a:p>
-            <a:endParaRPr lang="cs-CZ" i="1" dirty="0">
-              <a:solidFill>
-                <a:srgbClr val="FF0000"/>
-              </a:solidFill>
-            </a:endParaRPr>
-          </a:p>
-          <a:p>
+              <a:t> use, </a:t>
+            </a:r>
+            <a:r>
+              <a:rPr lang="cs-CZ" i="1" dirty="0" err="1">
+                <a:solidFill>
+                  <a:srgbClr val="FF0000"/>
+                </a:solidFill>
+              </a:rPr>
+              <a:t>then</a:t>
+            </a:r>
             <a:r>
               <a:rPr lang="cs-CZ" i="1" dirty="0">
                 <a:solidFill>
                   <a:srgbClr val="FF0000"/>
                 </a:solidFill>
               </a:rPr>
-              <a:t>1 - </a:t>
+              <a:t>: 1-</a:t>
             </a:r>
             <a:r>
               <a:rPr lang="en-GB" b="0" i="1" u="none" strike="noStrike" dirty="0">
@@ -28302,7 +29187,78 @@
                 </a:solidFill>
                 <a:effectLst/>
               </a:rPr>
-              <a:t>exp(−0.13277)= 1 - 0.8757 = 12,4%</a:t>
+              <a:t>exp(−0.13277)= 1-0.8757 = 12,4%</a:t>
+            </a:r>
+          </a:p>
+          <a:p>
+            <a:pPr marL="342900" indent="-342900">
+              <a:buAutoNum type="arabicParenR"/>
+            </a:pPr>
+            <a:r>
+              <a:rPr lang="en-GB" i="1" dirty="0">
+                <a:solidFill>
+                  <a:srgbClr val="FF0000"/>
+                </a:solidFill>
+              </a:rPr>
+              <a:t>Better don’t use as </a:t>
+            </a:r>
+          </a:p>
+          <a:p>
+            <a:pPr marL="800100" lvl="1" indent="-342900">
+              <a:buAutoNum type="arabicParenR"/>
+            </a:pPr>
+            <a:r>
+              <a:rPr lang="en-GB" i="1" dirty="0">
+                <a:solidFill>
+                  <a:srgbClr val="FF0000"/>
+                </a:solidFill>
+              </a:rPr>
+              <a:t>model is non linear, i.e. changing coefficient by 0.5 </a:t>
+            </a:r>
+            <a:r>
+              <a:rPr lang="en-GB" i="1" dirty="0" err="1">
+                <a:solidFill>
+                  <a:srgbClr val="FF0000"/>
+                </a:solidFill>
+              </a:rPr>
+              <a:t>doens’t</a:t>
+            </a:r>
+            <a:r>
+              <a:rPr lang="en-GB" i="1" dirty="0">
+                <a:solidFill>
+                  <a:srgbClr val="FF0000"/>
+                </a:solidFill>
+              </a:rPr>
+              <a:t> produce constant probability change (depends on baseline)</a:t>
+            </a:r>
+          </a:p>
+          <a:p>
+            <a:pPr marL="800100" lvl="1" indent="-342900">
+              <a:buAutoNum type="arabicParenR"/>
+            </a:pPr>
+            <a:r>
+              <a:rPr lang="en-GB" i="1" dirty="0">
+                <a:solidFill>
+                  <a:srgbClr val="FF0000"/>
+                </a:solidFill>
+              </a:rPr>
+              <a:t>Concept of </a:t>
+            </a:r>
+            <a:r>
+              <a:rPr lang="en-GB" i="1" dirty="0" err="1">
+                <a:solidFill>
+                  <a:srgbClr val="FF0000"/>
+                </a:solidFill>
+              </a:rPr>
+              <a:t>logodds</a:t>
+            </a:r>
+            <a:r>
+              <a:rPr lang="en-GB" i="1" dirty="0">
+                <a:solidFill>
+                  <a:srgbClr val="FF0000"/>
+                </a:solidFill>
+              </a:rPr>
+              <a:t> is not trivial (unnecessary cognitive load)</a:t>
             </a:r>
             <a:endParaRPr lang="en-US" i="1" dirty="0">
               <a:solidFill>
@@ -29143,8 +30099,8 @@
         </p:nvSpPr>
         <p:spPr>
           <a:xfrm>
-            <a:off x="1370430" y="3752144"/>
-            <a:ext cx="8203143" cy="369332"/>
+            <a:off x="623392" y="3184661"/>
+            <a:ext cx="7197740" cy="3416320"/>
           </a:xfrm>
           <a:prstGeom prst="rect">
             <a:avLst/>
@@ -29158,15 +30114,152 @@
           <a:lstStyle/>
           <a:p>
             <a:r>
-              <a:rPr lang="cs-CZ" i="1" dirty="0">
+              <a:rPr lang="cs-CZ" sz="1200" i="1" dirty="0">
                 <a:solidFill>
                   <a:srgbClr val="FF0000"/>
                 </a:solidFill>
               </a:rPr>
               <a:t>SB: </a:t>
             </a:r>
-            <a:r>
-              <a:rPr lang="cs-CZ" i="1" dirty="0" err="1">
+          </a:p>
+          <a:p>
+            <a:r>
+              <a:rPr lang="cs-CZ" sz="1200" i="1" dirty="0" err="1">
+                <a:solidFill>
+                  <a:srgbClr val="FF0000"/>
+                </a:solidFill>
+              </a:rPr>
+              <a:t>Short</a:t>
+            </a:r>
+            <a:r>
+              <a:rPr lang="cs-CZ" sz="1200" i="1" dirty="0">
+                <a:solidFill>
+                  <a:srgbClr val="FF0000"/>
+                </a:solidFill>
+              </a:rPr>
+              <a:t>-term </a:t>
+            </a:r>
+          </a:p>
+          <a:p>
+            <a:r>
+              <a:rPr lang="cs-CZ" sz="1200" i="1" dirty="0" err="1">
+                <a:solidFill>
+                  <a:srgbClr val="FF0000"/>
+                </a:solidFill>
+              </a:rPr>
+              <a:t>options</a:t>
+            </a:r>
+            <a:r>
+              <a:rPr lang="cs-CZ" sz="1200" i="1" dirty="0">
+                <a:solidFill>
+                  <a:srgbClr val="FF0000"/>
+                </a:solidFill>
+              </a:rPr>
+              <a:t> (</a:t>
+            </a:r>
+            <a:r>
+              <a:rPr lang="cs-CZ" sz="1200" i="1" dirty="0" err="1">
+                <a:solidFill>
+                  <a:srgbClr val="FF0000"/>
+                </a:solidFill>
+              </a:rPr>
+              <a:t>depends</a:t>
+            </a:r>
+            <a:r>
+              <a:rPr lang="cs-CZ" sz="1200" i="1" dirty="0">
+                <a:solidFill>
+                  <a:srgbClr val="FF0000"/>
+                </a:solidFill>
+              </a:rPr>
+              <a:t> on </a:t>
+            </a:r>
+            <a:r>
+              <a:rPr lang="cs-CZ" sz="1200" i="1" dirty="0" err="1">
+                <a:solidFill>
+                  <a:srgbClr val="FF0000"/>
+                </a:solidFill>
+              </a:rPr>
+              <a:t>context</a:t>
+            </a:r>
+            <a:r>
+              <a:rPr lang="cs-CZ" sz="1200" i="1" dirty="0">
+                <a:solidFill>
+                  <a:srgbClr val="FF0000"/>
+                </a:solidFill>
+              </a:rPr>
+              <a:t>, </a:t>
+            </a:r>
+            <a:r>
+              <a:rPr lang="cs-CZ" sz="1200" i="1" dirty="0" err="1">
+                <a:solidFill>
+                  <a:srgbClr val="FF0000"/>
+                </a:solidFill>
+              </a:rPr>
+              <a:t>which</a:t>
+            </a:r>
+            <a:r>
+              <a:rPr lang="cs-CZ" sz="1200" i="1" dirty="0">
+                <a:solidFill>
+                  <a:srgbClr val="FF0000"/>
+                </a:solidFill>
+              </a:rPr>
+              <a:t> I </a:t>
+            </a:r>
+            <a:r>
+              <a:rPr lang="cs-CZ" sz="1200" i="1" dirty="0" err="1">
+                <a:solidFill>
+                  <a:srgbClr val="FF0000"/>
+                </a:solidFill>
+              </a:rPr>
+              <a:t>don‘t</a:t>
+            </a:r>
+            <a:r>
+              <a:rPr lang="cs-CZ" sz="1200" i="1" dirty="0">
+                <a:solidFill>
+                  <a:srgbClr val="FF0000"/>
+                </a:solidFill>
+              </a:rPr>
+              <a:t> </a:t>
+            </a:r>
+            <a:r>
+              <a:rPr lang="cs-CZ" sz="1200" i="1" dirty="0" err="1">
+                <a:solidFill>
+                  <a:srgbClr val="FF0000"/>
+                </a:solidFill>
+              </a:rPr>
+              <a:t>know</a:t>
+            </a:r>
+            <a:r>
+              <a:rPr lang="cs-CZ" sz="1200" i="1" dirty="0">
+                <a:solidFill>
+                  <a:srgbClr val="FF0000"/>
+                </a:solidFill>
+              </a:rPr>
+              <a:t>):</a:t>
+            </a:r>
+          </a:p>
+          <a:p>
+            <a:pPr marL="342900" indent="-342900">
+              <a:buAutoNum type="arabicParenR"/>
+            </a:pPr>
+            <a:r>
+              <a:rPr lang="cs-CZ" sz="1200" i="1" dirty="0" err="1">
+                <a:solidFill>
+                  <a:srgbClr val="FF0000"/>
+                </a:solidFill>
+              </a:rPr>
+              <a:t>Optimal</a:t>
+            </a:r>
+            <a:r>
+              <a:rPr lang="cs-CZ" sz="1200" i="1" dirty="0">
+                <a:solidFill>
+                  <a:srgbClr val="FF0000"/>
+                </a:solidFill>
+              </a:rPr>
+              <a:t>: </a:t>
+            </a:r>
+            <a:r>
+              <a:rPr lang="cs-CZ" sz="1200" i="1" dirty="0" err="1">
                 <a:solidFill>
                   <a:srgbClr val="FF0000"/>
                 </a:solidFill>
@@ -29174,7 +30267,7 @@
               <a:t>give</a:t>
             </a:r>
             <a:r>
-              <a:rPr lang="cs-CZ" i="1" dirty="0">
+              <a:rPr lang="cs-CZ" sz="1200" i="1" dirty="0">
                 <a:solidFill>
                   <a:srgbClr val="FF0000"/>
                 </a:solidFill>
@@ -29182,7 +30275,7 @@
               <a:t> </a:t>
             </a:r>
             <a:r>
-              <a:rPr lang="cs-CZ" i="1" dirty="0" err="1">
+              <a:rPr lang="cs-CZ" sz="1200" i="1" dirty="0" err="1">
                 <a:solidFill>
                   <a:srgbClr val="FF0000"/>
                 </a:solidFill>
@@ -29190,7 +30283,7 @@
               <a:t>it</a:t>
             </a:r>
             <a:r>
-              <a:rPr lang="cs-CZ" i="1" dirty="0">
+              <a:rPr lang="cs-CZ" sz="1200" i="1" dirty="0">
                 <a:solidFill>
                   <a:srgbClr val="FF0000"/>
                 </a:solidFill>
@@ -29198,7 +30291,7 @@
               <a:t> 2 more </a:t>
             </a:r>
             <a:r>
-              <a:rPr lang="cs-CZ" i="1" dirty="0" err="1">
+              <a:rPr lang="cs-CZ" sz="1200" i="1" dirty="0" err="1">
                 <a:solidFill>
                   <a:srgbClr val="FF0000"/>
                 </a:solidFill>
@@ -29206,7 +30299,7 @@
               <a:t>days</a:t>
             </a:r>
             <a:r>
-              <a:rPr lang="cs-CZ" i="1" dirty="0">
+              <a:rPr lang="cs-CZ" sz="1200" i="1" dirty="0">
                 <a:solidFill>
                   <a:srgbClr val="FF0000"/>
                 </a:solidFill>
@@ -29214,15 +30307,31 @@
               <a:t> and </a:t>
             </a:r>
             <a:r>
-              <a:rPr lang="cs-CZ" i="1" dirty="0" err="1">
-                <a:solidFill>
-                  <a:srgbClr val="FF0000"/>
-                </a:solidFill>
-              </a:rPr>
-              <a:t>cancel</a:t>
-            </a:r>
-            <a:r>
-              <a:rPr lang="cs-CZ" i="1" dirty="0">
+              <a:rPr lang="cs-CZ" sz="1200" i="1" dirty="0" err="1">
+                <a:solidFill>
+                  <a:srgbClr val="FF0000"/>
+                </a:solidFill>
+              </a:rPr>
+              <a:t>if</a:t>
+            </a:r>
+            <a:r>
+              <a:rPr lang="cs-CZ" sz="1200" i="1" dirty="0">
+                <a:solidFill>
+                  <a:srgbClr val="FF0000"/>
+                </a:solidFill>
+              </a:rPr>
+              <a:t> more </a:t>
+            </a:r>
+            <a:r>
+              <a:rPr lang="cs-CZ" sz="1200" i="1" dirty="0" err="1">
+                <a:solidFill>
+                  <a:srgbClr val="FF0000"/>
+                </a:solidFill>
+              </a:rPr>
+              <a:t>research</a:t>
+            </a:r>
+            <a:r>
+              <a:rPr lang="cs-CZ" sz="1200" i="1" dirty="0">
                 <a:solidFill>
                   <a:srgbClr val="FF0000"/>
                 </a:solidFill>
@@ -29230,7 +30339,71 @@
               <a:t> </a:t>
             </a:r>
             <a:r>
-              <a:rPr lang="cs-CZ" i="1" dirty="0" err="1">
+              <a:rPr lang="cs-CZ" sz="1200" i="1" dirty="0" err="1">
+                <a:solidFill>
+                  <a:srgbClr val="FF0000"/>
+                </a:solidFill>
+              </a:rPr>
+              <a:t>is</a:t>
+            </a:r>
+            <a:r>
+              <a:rPr lang="cs-CZ" sz="1200" i="1" dirty="0">
+                <a:solidFill>
+                  <a:srgbClr val="FF0000"/>
+                </a:solidFill>
+              </a:rPr>
+              <a:t> </a:t>
+            </a:r>
+            <a:r>
+              <a:rPr lang="cs-CZ" sz="1200" i="1" dirty="0" err="1">
+                <a:solidFill>
+                  <a:srgbClr val="FF0000"/>
+                </a:solidFill>
+              </a:rPr>
+              <a:t>still</a:t>
+            </a:r>
+            <a:r>
+              <a:rPr lang="cs-CZ" sz="1200" i="1" dirty="0">
+                <a:solidFill>
+                  <a:srgbClr val="FF0000"/>
+                </a:solidFill>
+              </a:rPr>
+              <a:t> </a:t>
+            </a:r>
+            <a:r>
+              <a:rPr lang="cs-CZ" sz="1200" i="1" dirty="0" err="1">
+                <a:solidFill>
+                  <a:srgbClr val="FF0000"/>
+                </a:solidFill>
+              </a:rPr>
+              <a:t>needed</a:t>
+            </a:r>
+            <a:r>
+              <a:rPr lang="cs-CZ" sz="1200" i="1" dirty="0">
+                <a:solidFill>
+                  <a:srgbClr val="FF0000"/>
+                </a:solidFill>
+              </a:rPr>
+              <a:t> </a:t>
+            </a:r>
+            <a:r>
+              <a:rPr lang="cs-CZ" sz="1200" i="1" dirty="0" err="1">
+                <a:solidFill>
+                  <a:srgbClr val="FF0000"/>
+                </a:solidFill>
+              </a:rPr>
+              <a:t>reschedule</a:t>
+            </a:r>
+            <a:r>
+              <a:rPr lang="cs-CZ" sz="1200" i="1" dirty="0">
+                <a:solidFill>
+                  <a:srgbClr val="FF0000"/>
+                </a:solidFill>
+              </a:rPr>
+              <a:t> </a:t>
+            </a:r>
+            <a:r>
+              <a:rPr lang="cs-CZ" sz="1200" i="1" dirty="0" err="1">
                 <a:solidFill>
                   <a:srgbClr val="FF0000"/>
                 </a:solidFill>
@@ -29238,15 +30411,81 @@
               <a:t>the</a:t>
             </a:r>
             <a:r>
-              <a:rPr lang="cs-CZ" i="1" dirty="0">
-                <a:solidFill>
-                  <a:srgbClr val="FF0000"/>
-                </a:solidFill>
-              </a:rPr>
-              <a:t> meeting </a:t>
-            </a:r>
-            <a:r>
-              <a:rPr lang="cs-CZ" i="1" dirty="0" err="1">
+              <a:rPr lang="cs-CZ" sz="1200" i="1" dirty="0">
+                <a:solidFill>
+                  <a:srgbClr val="FF0000"/>
+                </a:solidFill>
+              </a:rPr>
+              <a:t> meeting (1 </a:t>
+            </a:r>
+            <a:r>
+              <a:rPr lang="cs-CZ" sz="1200" i="1" dirty="0" err="1">
+                <a:solidFill>
+                  <a:srgbClr val="FF0000"/>
+                </a:solidFill>
+              </a:rPr>
+              <a:t>week</a:t>
+            </a:r>
+            <a:r>
+              <a:rPr lang="cs-CZ" sz="1200" i="1" dirty="0">
+                <a:solidFill>
+                  <a:srgbClr val="FF0000"/>
+                </a:solidFill>
+              </a:rPr>
+              <a:t>)</a:t>
+            </a:r>
+          </a:p>
+          <a:p>
+            <a:pPr marL="342900" indent="-342900">
+              <a:buAutoNum type="arabicParenR"/>
+            </a:pPr>
+            <a:r>
+              <a:rPr lang="cs-CZ" sz="1200" i="1" dirty="0" err="1">
+                <a:solidFill>
+                  <a:srgbClr val="FF0000"/>
+                </a:solidFill>
+              </a:rPr>
+              <a:t>Suboptimal</a:t>
+            </a:r>
+            <a:r>
+              <a:rPr lang="cs-CZ" sz="1200" i="1" dirty="0">
+                <a:solidFill>
+                  <a:srgbClr val="FF0000"/>
+                </a:solidFill>
+              </a:rPr>
+              <a:t>:</a:t>
+            </a:r>
+          </a:p>
+          <a:p>
+            <a:pPr marL="800100" lvl="1" indent="-342900">
+              <a:buAutoNum type="arabicParenR"/>
+            </a:pPr>
+            <a:r>
+              <a:rPr lang="cs-CZ" sz="1200" i="1" dirty="0">
+                <a:solidFill>
+                  <a:srgbClr val="FF0000"/>
+                </a:solidFill>
+              </a:rPr>
+              <a:t>do </a:t>
+            </a:r>
+            <a:r>
+              <a:rPr lang="cs-CZ" sz="1200" i="1" dirty="0" err="1">
+                <a:solidFill>
+                  <a:srgbClr val="FF0000"/>
+                </a:solidFill>
+              </a:rPr>
+              <a:t>propper</a:t>
+            </a:r>
+            <a:r>
+              <a:rPr lang="cs-CZ" sz="1200" i="1" dirty="0">
+                <a:solidFill>
+                  <a:srgbClr val="FF0000"/>
+                </a:solidFill>
+              </a:rPr>
+              <a:t> EDA – </a:t>
+            </a:r>
+            <a:r>
+              <a:rPr lang="cs-CZ" sz="1200" i="1" dirty="0" err="1">
                 <a:solidFill>
                   <a:srgbClr val="FF0000"/>
                 </a:solidFill>
@@ -29254,23 +30493,7 @@
               <a:t>if</a:t>
             </a:r>
             <a:r>
-              <a:rPr lang="cs-CZ" i="1" dirty="0">
-                <a:solidFill>
-                  <a:srgbClr val="FF0000"/>
-                </a:solidFill>
-              </a:rPr>
-              <a:t> more </a:t>
-            </a:r>
-            <a:r>
-              <a:rPr lang="cs-CZ" i="1" dirty="0" err="1">
-                <a:solidFill>
-                  <a:srgbClr val="FF0000"/>
-                </a:solidFill>
-              </a:rPr>
-              <a:t>research</a:t>
-            </a:r>
-            <a:r>
-              <a:rPr lang="cs-CZ" i="1" dirty="0">
+              <a:rPr lang="cs-CZ" sz="1200" i="1" dirty="0">
                 <a:solidFill>
                   <a:srgbClr val="FF0000"/>
                 </a:solidFill>
@@ -29278,15 +30501,31 @@
               <a:t> </a:t>
             </a:r>
             <a:r>
-              <a:rPr lang="cs-CZ" i="1" dirty="0" err="1">
-                <a:solidFill>
-                  <a:srgbClr val="FF0000"/>
-                </a:solidFill>
-              </a:rPr>
-              <a:t>is</a:t>
-            </a:r>
-            <a:r>
-              <a:rPr lang="cs-CZ" i="1" dirty="0">
+              <a:rPr lang="cs-CZ" sz="1200" i="1" dirty="0" err="1">
+                <a:solidFill>
+                  <a:srgbClr val="FF0000"/>
+                </a:solidFill>
+              </a:rPr>
+              <a:t>there</a:t>
+            </a:r>
+            <a:r>
+              <a:rPr lang="cs-CZ" sz="1200" i="1" dirty="0">
+                <a:solidFill>
+                  <a:srgbClr val="FF0000"/>
+                </a:solidFill>
+              </a:rPr>
+              <a:t> are </a:t>
+            </a:r>
+            <a:r>
+              <a:rPr lang="cs-CZ" sz="1200" i="1" dirty="0" err="1">
+                <a:solidFill>
+                  <a:srgbClr val="FF0000"/>
+                </a:solidFill>
+              </a:rPr>
+              <a:t>actionable</a:t>
+            </a:r>
+            <a:r>
+              <a:rPr lang="cs-CZ" sz="1200" i="1" dirty="0">
                 <a:solidFill>
                   <a:srgbClr val="FF0000"/>
                 </a:solidFill>
@@ -29294,15 +30533,31 @@
               <a:t> </a:t>
             </a:r>
             <a:r>
-              <a:rPr lang="cs-CZ" i="1" dirty="0" err="1">
-                <a:solidFill>
-                  <a:srgbClr val="FF0000"/>
-                </a:solidFill>
-              </a:rPr>
-              <a:t>still</a:t>
-            </a:r>
-            <a:r>
-              <a:rPr lang="cs-CZ" i="1" dirty="0">
+              <a:rPr lang="cs-CZ" sz="1200" i="1" dirty="0" err="1">
+                <a:solidFill>
+                  <a:srgbClr val="FF0000"/>
+                </a:solidFill>
+              </a:rPr>
+              <a:t>findings</a:t>
+            </a:r>
+            <a:r>
+              <a:rPr lang="cs-CZ" sz="1200" i="1" dirty="0">
+                <a:solidFill>
+                  <a:srgbClr val="FF0000"/>
+                </a:solidFill>
+              </a:rPr>
+              <a:t>, </a:t>
+            </a:r>
+            <a:r>
+              <a:rPr lang="cs-CZ" sz="1200" i="1" dirty="0" err="1">
+                <a:solidFill>
+                  <a:srgbClr val="FF0000"/>
+                </a:solidFill>
+              </a:rPr>
+              <a:t>then</a:t>
+            </a:r>
+            <a:r>
+              <a:rPr lang="cs-CZ" sz="1200" i="1" dirty="0">
                 <a:solidFill>
                   <a:srgbClr val="FF0000"/>
                 </a:solidFill>
@@ -29310,14 +30565,440 @@
               <a:t> </a:t>
             </a:r>
             <a:r>
-              <a:rPr lang="cs-CZ" i="1" dirty="0" err="1">
-                <a:solidFill>
-                  <a:srgbClr val="FF0000"/>
-                </a:solidFill>
-              </a:rPr>
-              <a:t>needed</a:t>
-            </a:r>
-            <a:endParaRPr lang="en-US" i="1" dirty="0"/>
+              <a:rPr lang="cs-CZ" sz="1200" i="1" dirty="0" err="1">
+                <a:solidFill>
+                  <a:srgbClr val="FF0000"/>
+                </a:solidFill>
+              </a:rPr>
+              <a:t>present</a:t>
+            </a:r>
+            <a:r>
+              <a:rPr lang="cs-CZ" sz="1200" i="1" dirty="0">
+                <a:solidFill>
+                  <a:srgbClr val="FF0000"/>
+                </a:solidFill>
+              </a:rPr>
+              <a:t> </a:t>
+            </a:r>
+            <a:r>
+              <a:rPr lang="cs-CZ" sz="1200" i="1" dirty="0" err="1">
+                <a:solidFill>
+                  <a:srgbClr val="FF0000"/>
+                </a:solidFill>
+              </a:rPr>
+              <a:t>it</a:t>
+            </a:r>
+            <a:r>
+              <a:rPr lang="cs-CZ" sz="1200" i="1" dirty="0">
+                <a:solidFill>
+                  <a:srgbClr val="FF0000"/>
+                </a:solidFill>
+              </a:rPr>
+              <a:t> and </a:t>
+            </a:r>
+            <a:r>
+              <a:rPr lang="cs-CZ" sz="1200" i="1" dirty="0" err="1">
+                <a:solidFill>
+                  <a:srgbClr val="FF0000"/>
+                </a:solidFill>
+              </a:rPr>
+              <a:t>agree</a:t>
+            </a:r>
+            <a:r>
+              <a:rPr lang="cs-CZ" sz="1200" i="1" dirty="0">
+                <a:solidFill>
+                  <a:srgbClr val="FF0000"/>
+                </a:solidFill>
+              </a:rPr>
+              <a:t> on </a:t>
+            </a:r>
+            <a:r>
+              <a:rPr lang="cs-CZ" sz="1200" i="1" dirty="0" err="1">
+                <a:solidFill>
+                  <a:srgbClr val="FF0000"/>
+                </a:solidFill>
+              </a:rPr>
+              <a:t>follow</a:t>
+            </a:r>
+            <a:r>
+              <a:rPr lang="cs-CZ" sz="1200" i="1" dirty="0">
+                <a:solidFill>
+                  <a:srgbClr val="FF0000"/>
+                </a:solidFill>
+              </a:rPr>
+              <a:t> up</a:t>
+            </a:r>
+          </a:p>
+          <a:p>
+            <a:pPr marL="800100" lvl="1" indent="-342900">
+              <a:buAutoNum type="arabicParenR"/>
+            </a:pPr>
+            <a:r>
+              <a:rPr lang="cs-CZ" sz="1200" i="1" dirty="0">
+                <a:solidFill>
+                  <a:srgbClr val="FF0000"/>
+                </a:solidFill>
+              </a:rPr>
+              <a:t>do </a:t>
+            </a:r>
+            <a:r>
+              <a:rPr lang="cs-CZ" sz="1200" i="1" dirty="0" err="1">
+                <a:solidFill>
+                  <a:srgbClr val="FF0000"/>
+                </a:solidFill>
+              </a:rPr>
+              <a:t>it</a:t>
+            </a:r>
+            <a:r>
+              <a:rPr lang="cs-CZ" sz="1200" i="1" dirty="0">
+                <a:solidFill>
+                  <a:srgbClr val="FF0000"/>
+                </a:solidFill>
+              </a:rPr>
+              <a:t> </a:t>
+            </a:r>
+            <a:r>
+              <a:rPr lang="cs-CZ" sz="1200" i="1" dirty="0" err="1">
+                <a:solidFill>
+                  <a:srgbClr val="FF0000"/>
+                </a:solidFill>
+              </a:rPr>
+              <a:t>myself</a:t>
+            </a:r>
+            <a:r>
+              <a:rPr lang="cs-CZ" sz="1200" i="1" dirty="0">
+                <a:solidFill>
+                  <a:srgbClr val="FF0000"/>
+                </a:solidFill>
+              </a:rPr>
+              <a:t>/</a:t>
+            </a:r>
+            <a:r>
+              <a:rPr lang="cs-CZ" sz="1200" i="1" dirty="0" err="1">
+                <a:solidFill>
+                  <a:srgbClr val="FF0000"/>
+                </a:solidFill>
+              </a:rPr>
+              <a:t>together</a:t>
+            </a:r>
+            <a:r>
+              <a:rPr lang="cs-CZ" sz="1200" i="1" dirty="0">
+                <a:solidFill>
+                  <a:srgbClr val="FF0000"/>
+                </a:solidFill>
+              </a:rPr>
+              <a:t> (</a:t>
+            </a:r>
+            <a:r>
+              <a:rPr lang="cs-CZ" sz="1200" i="1" dirty="0" err="1">
+                <a:solidFill>
+                  <a:srgbClr val="FF0000"/>
+                </a:solidFill>
+              </a:rPr>
+              <a:t>if</a:t>
+            </a:r>
+            <a:r>
+              <a:rPr lang="cs-CZ" sz="1200" i="1" dirty="0">
+                <a:solidFill>
+                  <a:srgbClr val="FF0000"/>
+                </a:solidFill>
+              </a:rPr>
+              <a:t> </a:t>
+            </a:r>
+            <a:r>
+              <a:rPr lang="cs-CZ" sz="1200" i="1" dirty="0" err="1">
+                <a:solidFill>
+                  <a:srgbClr val="FF0000"/>
+                </a:solidFill>
+              </a:rPr>
+              <a:t>it’s</a:t>
+            </a:r>
+            <a:r>
+              <a:rPr lang="cs-CZ" sz="1200" i="1" dirty="0">
+                <a:solidFill>
+                  <a:srgbClr val="FF0000"/>
+                </a:solidFill>
+              </a:rPr>
+              <a:t> </a:t>
+            </a:r>
+            <a:r>
+              <a:rPr lang="cs-CZ" sz="1200" i="1" dirty="0" err="1">
+                <a:solidFill>
+                  <a:srgbClr val="FF0000"/>
+                </a:solidFill>
+              </a:rPr>
+              <a:t>all</a:t>
+            </a:r>
+            <a:r>
+              <a:rPr lang="cs-CZ" sz="1200" i="1" dirty="0">
+                <a:solidFill>
+                  <a:srgbClr val="FF0000"/>
+                </a:solidFill>
+              </a:rPr>
+              <a:t> </a:t>
+            </a:r>
+            <a:r>
+              <a:rPr lang="cs-CZ" sz="1200" i="1" dirty="0" err="1">
+                <a:solidFill>
+                  <a:srgbClr val="FF0000"/>
+                </a:solidFill>
+              </a:rPr>
+              <a:t>hands</a:t>
+            </a:r>
+            <a:r>
+              <a:rPr lang="cs-CZ" sz="1200" i="1" dirty="0">
+                <a:solidFill>
+                  <a:srgbClr val="FF0000"/>
+                </a:solidFill>
+              </a:rPr>
+              <a:t> / </a:t>
+            </a:r>
+            <a:r>
+              <a:rPr lang="cs-CZ" sz="1200" i="1" dirty="0" err="1">
+                <a:solidFill>
+                  <a:srgbClr val="FF0000"/>
+                </a:solidFill>
+              </a:rPr>
+              <a:t>blocker</a:t>
+            </a:r>
+            <a:r>
+              <a:rPr lang="cs-CZ" sz="1200" i="1" dirty="0">
+                <a:solidFill>
+                  <a:srgbClr val="FF0000"/>
+                </a:solidFill>
+              </a:rPr>
+              <a:t> </a:t>
+            </a:r>
+            <a:r>
+              <a:rPr lang="cs-CZ" sz="1200" i="1" dirty="0" err="1">
+                <a:solidFill>
+                  <a:srgbClr val="FF0000"/>
+                </a:solidFill>
+              </a:rPr>
+              <a:t>for</a:t>
+            </a:r>
+            <a:r>
+              <a:rPr lang="cs-CZ" sz="1200" i="1" dirty="0">
+                <a:solidFill>
+                  <a:srgbClr val="FF0000"/>
+                </a:solidFill>
+              </a:rPr>
+              <a:t> </a:t>
+            </a:r>
+            <a:r>
+              <a:rPr lang="cs-CZ" sz="1200" i="1" dirty="0" err="1">
+                <a:solidFill>
+                  <a:srgbClr val="FF0000"/>
+                </a:solidFill>
+              </a:rPr>
+              <a:t>other</a:t>
+            </a:r>
+            <a:r>
+              <a:rPr lang="cs-CZ" sz="1200" i="1" dirty="0">
+                <a:solidFill>
+                  <a:srgbClr val="FF0000"/>
+                </a:solidFill>
+              </a:rPr>
+              <a:t> </a:t>
+            </a:r>
+            <a:r>
+              <a:rPr lang="cs-CZ" sz="1200" i="1" dirty="0" err="1">
+                <a:solidFill>
+                  <a:srgbClr val="FF0000"/>
+                </a:solidFill>
+              </a:rPr>
+              <a:t>teams</a:t>
+            </a:r>
+            <a:r>
+              <a:rPr lang="cs-CZ" sz="1200" i="1" dirty="0">
+                <a:solidFill>
+                  <a:srgbClr val="FF0000"/>
+                </a:solidFill>
+              </a:rPr>
+              <a:t> / </a:t>
+            </a:r>
+            <a:r>
+              <a:rPr lang="cs-CZ" sz="1200" i="1" dirty="0" err="1">
+                <a:solidFill>
+                  <a:srgbClr val="FF0000"/>
+                </a:solidFill>
+              </a:rPr>
+              <a:t>context</a:t>
+            </a:r>
+            <a:r>
+              <a:rPr lang="cs-CZ" sz="1200" i="1" dirty="0">
+                <a:solidFill>
+                  <a:srgbClr val="FF0000"/>
+                </a:solidFill>
+              </a:rPr>
+              <a:t> </a:t>
+            </a:r>
+            <a:r>
+              <a:rPr lang="cs-CZ" sz="1200" i="1" dirty="0" err="1">
+                <a:solidFill>
+                  <a:srgbClr val="FF0000"/>
+                </a:solidFill>
+              </a:rPr>
+              <a:t>requires</a:t>
+            </a:r>
+            <a:r>
+              <a:rPr lang="cs-CZ" sz="1200" i="1" dirty="0">
+                <a:solidFill>
+                  <a:srgbClr val="FF0000"/>
+                </a:solidFill>
+              </a:rPr>
+              <a:t> </a:t>
+            </a:r>
+            <a:r>
+              <a:rPr lang="cs-CZ" sz="1200" i="1" dirty="0" err="1">
+                <a:solidFill>
+                  <a:srgbClr val="FF0000"/>
+                </a:solidFill>
+              </a:rPr>
+              <a:t>it</a:t>
+            </a:r>
+            <a:r>
+              <a:rPr lang="cs-CZ" sz="1200" i="1" dirty="0">
+                <a:solidFill>
+                  <a:srgbClr val="FF0000"/>
+                </a:solidFill>
+              </a:rPr>
+              <a:t>)</a:t>
+            </a:r>
+          </a:p>
+          <a:p>
+            <a:pPr marL="800100" lvl="1" indent="-342900">
+              <a:buAutoNum type="arabicParenR"/>
+            </a:pPr>
+            <a:endParaRPr lang="en-US" sz="1200" i="1" dirty="0">
+              <a:solidFill>
+                <a:srgbClr val="FF0000"/>
+              </a:solidFill>
+            </a:endParaRPr>
+          </a:p>
+          <a:p>
+            <a:r>
+              <a:rPr lang="en-US" sz="1200" i="1" dirty="0">
+                <a:solidFill>
+                  <a:srgbClr val="FF0000"/>
+                </a:solidFill>
+              </a:rPr>
+              <a:t>Long-term</a:t>
+            </a:r>
+          </a:p>
+          <a:p>
+            <a:pPr marL="342900" indent="-342900">
+              <a:buAutoNum type="arabicParenR"/>
+            </a:pPr>
+            <a:r>
+              <a:rPr lang="en-US" sz="1200" i="1" dirty="0">
+                <a:solidFill>
+                  <a:srgbClr val="FF0000"/>
+                </a:solidFill>
+              </a:rPr>
+              <a:t>Fix process: </a:t>
+            </a:r>
+          </a:p>
+          <a:p>
+            <a:pPr marL="800100" lvl="1" indent="-342900">
+              <a:buAutoNum type="arabicParenR"/>
+            </a:pPr>
+            <a:r>
+              <a:rPr lang="en-US" sz="1200" i="1" dirty="0">
+                <a:solidFill>
+                  <a:srgbClr val="FF0000"/>
+                </a:solidFill>
+              </a:rPr>
+              <a:t>Scrum-master cannot assign this properly,</a:t>
+            </a:r>
+          </a:p>
+          <a:p>
+            <a:pPr marL="800100" lvl="1" indent="-342900">
+              <a:buAutoNum type="arabicParenR"/>
+            </a:pPr>
+            <a:r>
+              <a:rPr lang="en-US" sz="1200" i="1" dirty="0">
+                <a:solidFill>
+                  <a:srgbClr val="FF0000"/>
+                </a:solidFill>
+              </a:rPr>
+              <a:t>Checkpoints (2 weeks) are too rare for Junior level,</a:t>
+            </a:r>
+          </a:p>
+          <a:p>
+            <a:pPr marL="800100" lvl="1" indent="-342900">
+              <a:buAutoNum type="arabicParenR"/>
+            </a:pPr>
+            <a:r>
+              <a:rPr lang="en-US" sz="1200" i="1" dirty="0">
+                <a:solidFill>
+                  <a:srgbClr val="FF0000"/>
+                </a:solidFill>
+              </a:rPr>
+              <a:t>“Write analytical design” (peer-reviewed) must be first task/US in sprint</a:t>
+            </a:r>
+          </a:p>
+          <a:p>
+            <a:pPr marL="342900" indent="-342900">
+              <a:buAutoNum type="arabicParenR"/>
+            </a:pPr>
+            <a:r>
+              <a:rPr lang="en-US" sz="1200" i="1" dirty="0">
+                <a:solidFill>
+                  <a:srgbClr val="FF0000"/>
+                </a:solidFill>
+              </a:rPr>
+              <a:t>Action points for JDA:</a:t>
+            </a:r>
+          </a:p>
+          <a:p>
+            <a:pPr marL="800100" lvl="1" indent="-342900">
+              <a:buAutoNum type="arabicParenR"/>
+            </a:pPr>
+            <a:r>
+              <a:rPr lang="en-US" sz="1200" i="1" dirty="0">
+                <a:solidFill>
+                  <a:srgbClr val="FF0000"/>
+                </a:solidFill>
+              </a:rPr>
+              <a:t>Assess personality treats (e.g. HEXACO, Motivation)</a:t>
+            </a:r>
+          </a:p>
+          <a:p>
+            <a:pPr marL="800100" lvl="1" indent="-342900">
+              <a:buAutoNum type="arabicParenR"/>
+            </a:pPr>
+            <a:r>
+              <a:rPr lang="en-US" sz="1200" i="1" dirty="0">
+                <a:solidFill>
+                  <a:srgbClr val="FF0000"/>
+                </a:solidFill>
+              </a:rPr>
+              <a:t>Build skills map,</a:t>
+            </a:r>
+          </a:p>
+          <a:p>
+            <a:pPr marL="800100" lvl="1" indent="-342900">
+              <a:buAutoNum type="arabicParenR"/>
+            </a:pPr>
+            <a:r>
+              <a:rPr lang="en-US" sz="1200" i="1" dirty="0">
+                <a:solidFill>
+                  <a:srgbClr val="FF0000"/>
+                </a:solidFill>
+              </a:rPr>
+              <a:t>Build development plan (together)</a:t>
+            </a:r>
+          </a:p>
+          <a:p>
+            <a:pPr marL="342900" indent="-342900">
+              <a:buAutoNum type="arabicParenR"/>
+            </a:pPr>
+            <a:endParaRPr lang="cs-CZ" sz="1200" i="1" dirty="0">
+              <a:solidFill>
+                <a:srgbClr val="FF0000"/>
+              </a:solidFill>
+            </a:endParaRPr>
           </a:p>
         </p:txBody>
       </p:sp>
@@ -29463,7 +31144,7 @@
           <a:p>
             <a:fld id="{92BD7BEA-F208-4EA6-9D7D-7072581083D1}" type="datetime1">
               <a:rPr lang="en-GB" smtClean="0"/>
-              <a:t>16/06/2026</a:t>
+              <a:t>17/06/2026</a:t>
             </a:fld>
             <a:endParaRPr lang="en-GB" dirty="0"/>
           </a:p>
@@ -29558,6 +31239,82 @@
           </a:prstGeom>
         </p:spPr>
       </p:pic>
+      <p:sp>
+        <p:nvSpPr>
+          <p:cNvPr id="5" name="TextBox 4">
+            <a:extLst>
+              <a:ext uri="{FF2B5EF4-FFF2-40B4-BE49-F238E27FC236}">
+                <a16:creationId xmlns:a16="http://schemas.microsoft.com/office/drawing/2014/main" id="{AFE1AD38-FD48-90EF-0878-65E941987E92}"/>
+              </a:ext>
+            </a:extLst>
+          </p:cNvPr>
+          <p:cNvSpPr txBox="1"/>
+          <p:nvPr/>
+        </p:nvSpPr>
+        <p:spPr>
+          <a:xfrm>
+            <a:off x="2742594" y="4915164"/>
+            <a:ext cx="2901051" cy="369332"/>
+          </a:xfrm>
+          <a:prstGeom prst="rect">
+            <a:avLst/>
+          </a:prstGeom>
+          <a:noFill/>
+        </p:spPr>
+        <p:txBody>
+          <a:bodyPr wrap="none" rtlCol="0">
+            <a:spAutoFit/>
+          </a:bodyPr>
+          <a:lstStyle/>
+          <a:p>
+            <a:r>
+              <a:rPr lang="cs-CZ" i="1" dirty="0">
+                <a:solidFill>
+                  <a:srgbClr val="FF0000"/>
+                </a:solidFill>
+              </a:rPr>
+              <a:t>SB: </a:t>
+            </a:r>
+            <a:r>
+              <a:rPr lang="cs-CZ" i="1" dirty="0" err="1">
+                <a:solidFill>
+                  <a:srgbClr val="FF0000"/>
+                </a:solidFill>
+              </a:rPr>
+              <a:t>put</a:t>
+            </a:r>
+            <a:r>
+              <a:rPr lang="cs-CZ" i="1" dirty="0">
+                <a:solidFill>
+                  <a:srgbClr val="FF0000"/>
+                </a:solidFill>
+              </a:rPr>
+              <a:t> </a:t>
+            </a:r>
+            <a:r>
+              <a:rPr lang="cs-CZ" i="1" dirty="0" err="1">
+                <a:solidFill>
+                  <a:srgbClr val="FF0000"/>
+                </a:solidFill>
+              </a:rPr>
+              <a:t>it</a:t>
+            </a:r>
+            <a:r>
+              <a:rPr lang="cs-CZ" i="1" dirty="0">
+                <a:solidFill>
+                  <a:srgbClr val="FF0000"/>
+                </a:solidFill>
+              </a:rPr>
+              <a:t> in a proper table</a:t>
+            </a:r>
+            <a:endParaRPr lang="en-US" i="1" dirty="0">
+              <a:solidFill>
+                <a:srgbClr val="FF0000"/>
+              </a:solidFill>
+            </a:endParaRPr>
+          </a:p>
+        </p:txBody>
+      </p:sp>
     </p:spTree>
     <p:extLst>
       <p:ext uri="{BB962C8B-B14F-4D97-AF65-F5344CB8AC3E}">
@@ -29611,7 +31368,7 @@
           <a:p>
             <a:fld id="{92BD7BEA-F208-4EA6-9D7D-7072581083D1}" type="datetime1">
               <a:rPr lang="en-GB" smtClean="0"/>
-              <a:t>16/06/2026</a:t>
+              <a:t>17/06/2026</a:t>
             </a:fld>
             <a:endParaRPr lang="en-GB" dirty="0"/>
           </a:p>
@@ -29880,6 +31637,597 @@
           </p:pic>
         </mc:Fallback>
       </mc:AlternateContent>
+      <p:sp>
+        <p:nvSpPr>
+          <p:cNvPr id="5" name="TextBox 4">
+            <a:extLst>
+              <a:ext uri="{FF2B5EF4-FFF2-40B4-BE49-F238E27FC236}">
+                <a16:creationId xmlns:a16="http://schemas.microsoft.com/office/drawing/2014/main" id="{2A94D726-A93F-3EFE-49D5-A4EE3D0EE826}"/>
+              </a:ext>
+            </a:extLst>
+          </p:cNvPr>
+          <p:cNvSpPr txBox="1"/>
+          <p:nvPr/>
+        </p:nvSpPr>
+        <p:spPr>
+          <a:xfrm>
+            <a:off x="2927648" y="5195264"/>
+            <a:ext cx="8636660" cy="1200329"/>
+          </a:xfrm>
+          <a:prstGeom prst="rect">
+            <a:avLst/>
+          </a:prstGeom>
+          <a:noFill/>
+        </p:spPr>
+        <p:txBody>
+          <a:bodyPr wrap="none" rtlCol="0">
+            <a:spAutoFit/>
+          </a:bodyPr>
+          <a:lstStyle/>
+          <a:p>
+            <a:r>
+              <a:rPr lang="cs-CZ" i="1" dirty="0">
+                <a:solidFill>
+                  <a:srgbClr val="FF0000"/>
+                </a:solidFill>
+              </a:rPr>
+              <a:t>SB:  </a:t>
+            </a:r>
+            <a:r>
+              <a:rPr lang="cs-CZ" i="1" u="sng" dirty="0">
+                <a:solidFill>
+                  <a:srgbClr val="FF0000"/>
+                </a:solidFill>
+              </a:rPr>
+              <a:t>in </a:t>
+            </a:r>
+            <a:r>
+              <a:rPr lang="cs-CZ" i="1" u="sng" dirty="0" err="1">
+                <a:solidFill>
+                  <a:srgbClr val="FF0000"/>
+                </a:solidFill>
+              </a:rPr>
+              <a:t>general</a:t>
+            </a:r>
+            <a:r>
+              <a:rPr lang="cs-CZ" i="1" u="sng" dirty="0">
+                <a:solidFill>
+                  <a:srgbClr val="FF0000"/>
+                </a:solidFill>
+              </a:rPr>
+              <a:t> – </a:t>
+            </a:r>
+            <a:r>
+              <a:rPr lang="cs-CZ" i="1" u="sng" dirty="0" err="1">
+                <a:solidFill>
+                  <a:srgbClr val="FF0000"/>
+                </a:solidFill>
+              </a:rPr>
+              <a:t>try</a:t>
+            </a:r>
+            <a:r>
+              <a:rPr lang="cs-CZ" i="1" u="sng" dirty="0">
+                <a:solidFill>
+                  <a:srgbClr val="FF0000"/>
+                </a:solidFill>
+              </a:rPr>
+              <a:t> to </a:t>
+            </a:r>
+            <a:r>
+              <a:rPr lang="cs-CZ" i="1" u="sng" dirty="0" err="1">
+                <a:solidFill>
+                  <a:srgbClr val="FF0000"/>
+                </a:solidFill>
+              </a:rPr>
+              <a:t>reduce</a:t>
+            </a:r>
+            <a:r>
+              <a:rPr lang="cs-CZ" i="1" u="sng" dirty="0">
+                <a:solidFill>
+                  <a:srgbClr val="FF0000"/>
+                </a:solidFill>
+              </a:rPr>
+              <a:t> </a:t>
+            </a:r>
+            <a:r>
+              <a:rPr lang="cs-CZ" i="1" u="sng" dirty="0" err="1">
+                <a:solidFill>
+                  <a:srgbClr val="FF0000"/>
+                </a:solidFill>
+              </a:rPr>
+              <a:t>reader‘s</a:t>
+            </a:r>
+            <a:r>
+              <a:rPr lang="cs-CZ" i="1" u="sng" dirty="0">
+                <a:solidFill>
+                  <a:srgbClr val="FF0000"/>
+                </a:solidFill>
+              </a:rPr>
+              <a:t> </a:t>
+            </a:r>
+            <a:r>
+              <a:rPr lang="cs-CZ" i="1" u="sng" dirty="0" err="1">
+                <a:solidFill>
+                  <a:srgbClr val="FF0000"/>
+                </a:solidFill>
+              </a:rPr>
+              <a:t>cognitive</a:t>
+            </a:r>
+            <a:r>
+              <a:rPr lang="cs-CZ" i="1" u="sng" dirty="0">
+                <a:solidFill>
+                  <a:srgbClr val="FF0000"/>
+                </a:solidFill>
+              </a:rPr>
+              <a:t> </a:t>
+            </a:r>
+            <a:r>
+              <a:rPr lang="cs-CZ" i="1" u="sng" dirty="0" err="1">
+                <a:solidFill>
+                  <a:srgbClr val="FF0000"/>
+                </a:solidFill>
+              </a:rPr>
+              <a:t>load</a:t>
+            </a:r>
+            <a:r>
+              <a:rPr lang="cs-CZ" i="1" u="sng" dirty="0">
+                <a:solidFill>
+                  <a:srgbClr val="FF0000"/>
+                </a:solidFill>
+              </a:rPr>
+              <a:t>  </a:t>
+            </a:r>
+            <a:r>
+              <a:rPr lang="cs-CZ" i="1" u="sng" dirty="0" err="1">
+                <a:solidFill>
+                  <a:srgbClr val="FF0000"/>
+                </a:solidFill>
+              </a:rPr>
+              <a:t>where</a:t>
+            </a:r>
+            <a:r>
+              <a:rPr lang="cs-CZ" i="1" u="sng" dirty="0">
+                <a:solidFill>
+                  <a:srgbClr val="FF0000"/>
+                </a:solidFill>
+              </a:rPr>
+              <a:t> </a:t>
+            </a:r>
+            <a:r>
+              <a:rPr lang="cs-CZ" i="1" u="sng" dirty="0" err="1">
+                <a:solidFill>
+                  <a:srgbClr val="FF0000"/>
+                </a:solidFill>
+              </a:rPr>
+              <a:t>possible</a:t>
+            </a:r>
+            <a:endParaRPr lang="cs-CZ" i="1" u="sng" dirty="0">
+              <a:solidFill>
+                <a:srgbClr val="FF0000"/>
+              </a:solidFill>
+            </a:endParaRPr>
+          </a:p>
+          <a:p>
+            <a:r>
+              <a:rPr lang="cs-CZ" i="1" dirty="0">
+                <a:solidFill>
+                  <a:srgbClr val="FF0000"/>
+                </a:solidFill>
+              </a:rPr>
+              <a:t>1) use </a:t>
+            </a:r>
+            <a:r>
+              <a:rPr lang="cs-CZ" i="1" dirty="0" err="1">
+                <a:solidFill>
+                  <a:srgbClr val="FF0000"/>
+                </a:solidFill>
+              </a:rPr>
+              <a:t>words</a:t>
+            </a:r>
+            <a:r>
+              <a:rPr lang="cs-CZ" i="1" dirty="0">
+                <a:solidFill>
+                  <a:srgbClr val="FF0000"/>
+                </a:solidFill>
+              </a:rPr>
+              <a:t> </a:t>
+            </a:r>
+            <a:r>
+              <a:rPr lang="cs-CZ" i="1" dirty="0" err="1">
+                <a:solidFill>
+                  <a:srgbClr val="FF0000"/>
+                </a:solidFill>
+              </a:rPr>
+              <a:t>add</a:t>
+            </a:r>
+            <a:r>
+              <a:rPr lang="cs-CZ" i="1" dirty="0">
+                <a:solidFill>
+                  <a:srgbClr val="FF0000"/>
+                </a:solidFill>
+              </a:rPr>
+              <a:t> proper </a:t>
+            </a:r>
+            <a:r>
+              <a:rPr lang="cs-CZ" i="1" dirty="0" err="1">
+                <a:solidFill>
+                  <a:srgbClr val="FF0000"/>
+                </a:solidFill>
+              </a:rPr>
+              <a:t>names</a:t>
+            </a:r>
+            <a:r>
+              <a:rPr lang="cs-CZ" i="1" dirty="0">
+                <a:solidFill>
+                  <a:srgbClr val="FF0000"/>
+                </a:solidFill>
+              </a:rPr>
+              <a:t> </a:t>
+            </a:r>
+            <a:r>
+              <a:rPr lang="cs-CZ" i="1" dirty="0" err="1">
+                <a:solidFill>
+                  <a:srgbClr val="FF0000"/>
+                </a:solidFill>
+              </a:rPr>
+              <a:t>instead</a:t>
+            </a:r>
+            <a:r>
+              <a:rPr lang="cs-CZ" i="1" dirty="0">
+                <a:solidFill>
+                  <a:srgbClr val="FF0000"/>
+                </a:solidFill>
+              </a:rPr>
+              <a:t> </a:t>
+            </a:r>
+            <a:r>
+              <a:rPr lang="cs-CZ" i="1" dirty="0" err="1">
+                <a:solidFill>
+                  <a:srgbClr val="FF0000"/>
+                </a:solidFill>
+              </a:rPr>
+              <a:t>of</a:t>
+            </a:r>
+            <a:r>
+              <a:rPr lang="cs-CZ" i="1" dirty="0">
+                <a:solidFill>
+                  <a:srgbClr val="FF0000"/>
+                </a:solidFill>
+              </a:rPr>
+              <a:t> </a:t>
+            </a:r>
+            <a:r>
+              <a:rPr lang="cs-CZ" i="1" dirty="0" err="1">
+                <a:solidFill>
+                  <a:srgbClr val="FF0000"/>
+                </a:solidFill>
+              </a:rPr>
+              <a:t>variables</a:t>
+            </a:r>
+            <a:r>
+              <a:rPr lang="cs-CZ" i="1" dirty="0">
+                <a:solidFill>
+                  <a:srgbClr val="FF0000"/>
+                </a:solidFill>
+              </a:rPr>
+              <a:t> and </a:t>
+            </a:r>
+            <a:r>
+              <a:rPr lang="cs-CZ" i="1" dirty="0" err="1">
+                <a:solidFill>
+                  <a:srgbClr val="FF0000"/>
+                </a:solidFill>
+              </a:rPr>
+              <a:t>flags</a:t>
+            </a:r>
+            <a:r>
+              <a:rPr lang="cs-CZ" i="1" dirty="0">
+                <a:solidFill>
+                  <a:srgbClr val="FF0000"/>
+                </a:solidFill>
+              </a:rPr>
+              <a:t> </a:t>
+            </a:r>
+          </a:p>
+          <a:p>
+            <a:r>
+              <a:rPr lang="cs-CZ" i="1" dirty="0">
+                <a:solidFill>
+                  <a:srgbClr val="FF0000"/>
+                </a:solidFill>
+              </a:rPr>
+              <a:t>2) Orient </a:t>
+            </a:r>
+            <a:r>
+              <a:rPr lang="cs-CZ" i="1" dirty="0" err="1">
+                <a:solidFill>
+                  <a:srgbClr val="FF0000"/>
+                </a:solidFill>
+              </a:rPr>
+              <a:t>graph</a:t>
+            </a:r>
+            <a:r>
+              <a:rPr lang="cs-CZ" i="1" dirty="0">
+                <a:solidFill>
+                  <a:srgbClr val="FF0000"/>
+                </a:solidFill>
+              </a:rPr>
+              <a:t> in </a:t>
+            </a:r>
+            <a:r>
+              <a:rPr lang="cs-CZ" i="1" dirty="0" err="1">
+                <a:solidFill>
+                  <a:srgbClr val="FF0000"/>
+                </a:solidFill>
+              </a:rPr>
+              <a:t>same</a:t>
+            </a:r>
+            <a:r>
+              <a:rPr lang="cs-CZ" i="1" dirty="0">
+                <a:solidFill>
+                  <a:srgbClr val="FF0000"/>
+                </a:solidFill>
+              </a:rPr>
+              <a:t> </a:t>
+            </a:r>
+            <a:r>
+              <a:rPr lang="cs-CZ" i="1" dirty="0" err="1">
+                <a:solidFill>
+                  <a:srgbClr val="FF0000"/>
+                </a:solidFill>
+              </a:rPr>
+              <a:t>way</a:t>
+            </a:r>
+            <a:r>
+              <a:rPr lang="cs-CZ" i="1" dirty="0">
+                <a:solidFill>
+                  <a:srgbClr val="FF0000"/>
+                </a:solidFill>
+              </a:rPr>
+              <a:t>, </a:t>
+            </a:r>
+            <a:r>
+              <a:rPr lang="cs-CZ" i="1" dirty="0" err="1">
+                <a:solidFill>
+                  <a:srgbClr val="FF0000"/>
+                </a:solidFill>
+              </a:rPr>
+              <a:t>unless</a:t>
+            </a:r>
+            <a:r>
+              <a:rPr lang="cs-CZ" i="1" dirty="0">
+                <a:solidFill>
+                  <a:srgbClr val="FF0000"/>
+                </a:solidFill>
+              </a:rPr>
+              <a:t> </a:t>
+            </a:r>
+            <a:r>
+              <a:rPr lang="cs-CZ" i="1" dirty="0" err="1">
+                <a:solidFill>
+                  <a:srgbClr val="FF0000"/>
+                </a:solidFill>
+              </a:rPr>
+              <a:t>needed</a:t>
+            </a:r>
+            <a:r>
+              <a:rPr lang="cs-CZ" i="1" dirty="0">
+                <a:solidFill>
+                  <a:srgbClr val="FF0000"/>
+                </a:solidFill>
+              </a:rPr>
+              <a:t> to </a:t>
+            </a:r>
+            <a:r>
+              <a:rPr lang="cs-CZ" i="1" dirty="0" err="1">
+                <a:solidFill>
+                  <a:srgbClr val="FF0000"/>
+                </a:solidFill>
+              </a:rPr>
+              <a:t>tell</a:t>
+            </a:r>
+            <a:r>
+              <a:rPr lang="cs-CZ" i="1" dirty="0">
+                <a:solidFill>
+                  <a:srgbClr val="FF0000"/>
+                </a:solidFill>
+              </a:rPr>
+              <a:t> </a:t>
+            </a:r>
+            <a:r>
+              <a:rPr lang="cs-CZ" i="1" dirty="0" err="1">
+                <a:solidFill>
+                  <a:srgbClr val="FF0000"/>
+                </a:solidFill>
+              </a:rPr>
+              <a:t>the</a:t>
+            </a:r>
+            <a:r>
+              <a:rPr lang="cs-CZ" i="1" dirty="0">
+                <a:solidFill>
+                  <a:srgbClr val="FF0000"/>
+                </a:solidFill>
+              </a:rPr>
+              <a:t> story (</a:t>
+            </a:r>
+            <a:r>
+              <a:rPr lang="cs-CZ" i="1" dirty="0" err="1">
+                <a:solidFill>
+                  <a:srgbClr val="FF0000"/>
+                </a:solidFill>
+              </a:rPr>
+              <a:t>across</a:t>
+            </a:r>
+            <a:r>
+              <a:rPr lang="cs-CZ" i="1" dirty="0">
+                <a:solidFill>
+                  <a:srgbClr val="FF0000"/>
+                </a:solidFill>
+              </a:rPr>
+              <a:t> </a:t>
+            </a:r>
+            <a:r>
+              <a:rPr lang="cs-CZ" i="1" dirty="0" err="1">
+                <a:solidFill>
+                  <a:srgbClr val="FF0000"/>
+                </a:solidFill>
+              </a:rPr>
+              <a:t>presentations</a:t>
+            </a:r>
+            <a:r>
+              <a:rPr lang="cs-CZ" i="1" dirty="0">
+                <a:solidFill>
+                  <a:srgbClr val="FF0000"/>
+                </a:solidFill>
+              </a:rPr>
+              <a:t>)</a:t>
+            </a:r>
+          </a:p>
+          <a:p>
+            <a:r>
+              <a:rPr lang="cs-CZ" i="1" dirty="0">
+                <a:solidFill>
+                  <a:srgbClr val="FF0000"/>
+                </a:solidFill>
+              </a:rPr>
+              <a:t>3) </a:t>
+            </a:r>
+            <a:r>
+              <a:rPr lang="cs-CZ" i="1" dirty="0" err="1">
+                <a:solidFill>
+                  <a:srgbClr val="FF0000"/>
+                </a:solidFill>
+              </a:rPr>
+              <a:t>Keep</a:t>
+            </a:r>
+            <a:r>
+              <a:rPr lang="cs-CZ" i="1" dirty="0">
+                <a:solidFill>
+                  <a:srgbClr val="FF0000"/>
+                </a:solidFill>
+              </a:rPr>
+              <a:t> </a:t>
+            </a:r>
+            <a:r>
+              <a:rPr lang="cs-CZ" i="1" dirty="0" err="1">
+                <a:solidFill>
+                  <a:srgbClr val="FF0000"/>
+                </a:solidFill>
+              </a:rPr>
+              <a:t>order</a:t>
+            </a:r>
+            <a:r>
+              <a:rPr lang="cs-CZ" i="1" dirty="0">
+                <a:solidFill>
+                  <a:srgbClr val="FF0000"/>
+                </a:solidFill>
+              </a:rPr>
+              <a:t> </a:t>
+            </a:r>
+            <a:r>
+              <a:rPr lang="cs-CZ" i="1" dirty="0" err="1">
+                <a:solidFill>
+                  <a:srgbClr val="FF0000"/>
+                </a:solidFill>
+              </a:rPr>
+              <a:t>of</a:t>
+            </a:r>
+            <a:r>
+              <a:rPr lang="cs-CZ" i="1" dirty="0">
+                <a:solidFill>
+                  <a:srgbClr val="FF0000"/>
+                </a:solidFill>
+              </a:rPr>
+              <a:t> </a:t>
+            </a:r>
+            <a:r>
+              <a:rPr lang="cs-CZ" i="1" dirty="0" err="1">
+                <a:solidFill>
+                  <a:srgbClr val="FF0000"/>
+                </a:solidFill>
+              </a:rPr>
+              <a:t>categories</a:t>
+            </a:r>
+            <a:r>
+              <a:rPr lang="cs-CZ" i="1" dirty="0">
+                <a:solidFill>
+                  <a:srgbClr val="FF0000"/>
+                </a:solidFill>
+              </a:rPr>
+              <a:t> </a:t>
+            </a:r>
+            <a:r>
+              <a:rPr lang="cs-CZ" i="1" dirty="0" err="1">
+                <a:solidFill>
+                  <a:srgbClr val="FF0000"/>
+                </a:solidFill>
+              </a:rPr>
+              <a:t>the</a:t>
+            </a:r>
+            <a:r>
+              <a:rPr lang="cs-CZ" i="1" dirty="0">
+                <a:solidFill>
+                  <a:srgbClr val="FF0000"/>
+                </a:solidFill>
+              </a:rPr>
+              <a:t> </a:t>
+            </a:r>
+            <a:r>
+              <a:rPr lang="cs-CZ" i="1" dirty="0" err="1">
+                <a:solidFill>
+                  <a:srgbClr val="FF0000"/>
+                </a:solidFill>
+              </a:rPr>
+              <a:t>same</a:t>
+            </a:r>
+            <a:r>
+              <a:rPr lang="cs-CZ" i="1" dirty="0">
+                <a:solidFill>
+                  <a:srgbClr val="FF0000"/>
+                </a:solidFill>
+              </a:rPr>
+              <a:t> (</a:t>
+            </a:r>
+            <a:r>
+              <a:rPr lang="cs-CZ" i="1" dirty="0" err="1">
+                <a:solidFill>
+                  <a:srgbClr val="FF0000"/>
+                </a:solidFill>
+              </a:rPr>
+              <a:t>across</a:t>
+            </a:r>
+            <a:r>
+              <a:rPr lang="cs-CZ" i="1" dirty="0">
+                <a:solidFill>
+                  <a:srgbClr val="FF0000"/>
+                </a:solidFill>
+              </a:rPr>
+              <a:t> </a:t>
+            </a:r>
+            <a:r>
+              <a:rPr lang="cs-CZ" i="1" dirty="0" err="1">
+                <a:solidFill>
+                  <a:srgbClr val="FF0000"/>
+                </a:solidFill>
+              </a:rPr>
+              <a:t>presentations</a:t>
+            </a:r>
+            <a:r>
+              <a:rPr lang="cs-CZ" i="1" dirty="0">
+                <a:solidFill>
+                  <a:srgbClr val="FF0000"/>
+                </a:solidFill>
+              </a:rPr>
+              <a:t>)</a:t>
+            </a:r>
+            <a:endParaRPr lang="en-US" i="1" dirty="0">
+              <a:solidFill>
+                <a:srgbClr val="FF0000"/>
+              </a:solidFill>
+            </a:endParaRPr>
+          </a:p>
+        </p:txBody>
+      </p:sp>
     </p:spTree>
     <p:extLst>
       <p:ext uri="{BB962C8B-B14F-4D97-AF65-F5344CB8AC3E}">

--- a/case_study/WiFi Booster Impact.pptx
+++ b/case_study/WiFi Booster Impact.pptx
@@ -32567,7 +32567,7 @@
         </p:blipFill>
         <p:spPr>
           <a:xfrm>
-            <a:off x="403258" y="1052736"/>
+            <a:off x="407988" y="1561839"/>
             <a:ext cx="11631648" cy="3734321"/>
           </a:xfrm>
           <a:prstGeom prst="rect">
